--- a/media/exports/reports/2026-04/people-helped.pptx
+++ b/media/exports/reports/2026-04/people-helped.pptx
@@ -180,7 +180,7 @@
             <c:idx val="4"/>
             <c:spPr>
               <a:solidFill>
-                <a:srgbClr val="0E9F6E"/>
+                <a:srgbClr val="7D8790"/>
               </a:solidFill>
             </c:spPr>
           </c:dPt>
@@ -190,19 +190,19 @@
               <c:strCache>
                 <c:ptCount val="5"/>
                 <c:pt idx="0">
+                  <c:v>Community meals</c:v>
+                </c:pt>
+                <c:pt idx="1">
+                  <c:v>Mental health first aid</c:v>
+                </c:pt>
+                <c:pt idx="2">
                   <c:v>Housing support</c:v>
                 </c:pt>
-                <c:pt idx="1">
-                  <c:v>Youth outreach</c:v>
-                </c:pt>
-                <c:pt idx="2">
+                <c:pt idx="3">
                   <c:v>Digital literacy</c:v>
                 </c:pt>
-                <c:pt idx="3">
-                  <c:v>Mental health first aid</c:v>
-                </c:pt>
                 <c:pt idx="4">
-                  <c:v>Community meals</c:v>
+                  <c:v>Youth outreach</c:v>
                 </c:pt>
               </c:strCache>
             </c:strRef>
@@ -214,19 +214,19 @@
                 <c:formatCode>0.0"%";[Red](0.0"%")</c:formatCode>
                 <c:ptCount val="5"/>
                 <c:pt idx="0">
-                  <c:v>85.6</c:v>
+                  <c:v>80.8</c:v>
                 </c:pt>
                 <c:pt idx="1">
-                  <c:v>86.0</c:v>
+                  <c:v>82.9</c:v>
                 </c:pt>
                 <c:pt idx="2">
-                  <c:v>87.9</c:v>
+                  <c:v>84.6</c:v>
                 </c:pt>
                 <c:pt idx="3">
-                  <c:v>88.3</c:v>
+                  <c:v>85.3</c:v>
                 </c:pt>
                 <c:pt idx="4">
-                  <c:v>90.8</c:v>
+                  <c:v>89.5</c:v>
                 </c:pt>
               </c:numCache>
             </c:numRef>
@@ -290,7 +290,7 @@
       <c:valAx>
         <c:axId val="-2113994440"/>
         <c:scaling>
-          <c:max val="104.41999999999999"/>
+          <c:max val="103.49999999999999"/>
           <c:min val="0.0"/>
         </c:scaling>
         <c:delete/>
@@ -1069,7 +1069,7 @@
           <a:lstStyle/>
           <a:p>
             <a:r>
-              <a:t>How many people did we help this month, and how many couldn't we reach?. People helped, April: 491; Couldn't reach, April: 66; Share reached, April: 88.2%. 491 people were helped in April, and 66 came to a program but couldn't be helped: 88.2% reached (target 90.0%), against 87.1% in March. Housing support reached the smallest share: 85.6% (13 couldn't be helped). The main reason: program at capacity (24 people).</a:t>
+              <a:t>How many people did we help this month, and how many couldn't we reach?. People helped, April: 491; Couldn't reach, April: 93; Share reached, April: 84.1%. 491 people were helped in April, and 93 came to a program but couldn't be helped: 84.1% reached (target 90.0%), against 85.7% in March. Community meals reached the smallest share: 80.8% (42 couldn't be helped). The main reason: program at capacity (34 people).</a:t>
             </a:r>
           </a:p>
         </p:txBody>
@@ -4624,7 +4624,7 @@
                 </a:solidFill>
                 <a:latin typeface="Roboto"/>
               </a:rPr>
-              <a:t>Data retrieved 2pm, Tue 6 Oct 2026 · Generated 8 Oct 2026, 6:29pm · Sample data · Made with Python (python-pptx)</a:t>
+              <a:t>Data retrieved 2pm, Tue 6 Oct 2026 · Generated 8 Oct 2026, 11:41pm · Sample data · Made with Python (python-pptx)</a:t>
             </a:r>
           </a:p>
         </p:txBody>
@@ -5136,7 +5136,7 @@
                 </a:solidFill>
                 <a:latin typeface="Roboto"/>
               </a:rPr>
-              <a:t>66</a:t>
+              <a:t>93</a:t>
             </a:r>
           </a:p>
         </p:txBody>
@@ -5175,7 +5175,7 @@
                 </a:solidFill>
                 <a:latin typeface="Roboto"/>
               </a:rPr>
-              <a:t>March 61</a:t>
+              <a:t>March 69</a:t>
             </a:r>
           </a:p>
         </p:txBody>
@@ -5298,11 +5298,11 @@
             <a:r>
               <a:rPr sz="2200" b="1">
                 <a:solidFill>
-                  <a:srgbClr val="8A6D3B"/>
+                  <a:srgbClr val="B42318"/>
                 </a:solidFill>
                 <a:latin typeface="Roboto"/>
               </a:rPr>
-              <a:t>88.2%</a:t>
+              <a:t>84.1%</a:t>
             </a:r>
           </a:p>
         </p:txBody>
@@ -5372,7 +5372,7 @@
         </p:nvCxnSpPr>
         <p:spPr>
           <a:xfrm>
-            <a:off x="9477956" y="2620868"/>
+            <a:off x="9528067" y="2620868"/>
             <a:ext cx="0" cy="2267834"/>
           </a:xfrm>
           <a:prstGeom prst="line">
@@ -5408,7 +5408,7 @@
         </p:nvSpPr>
         <p:spPr>
           <a:xfrm>
-            <a:off x="8380676" y="4888702"/>
+            <a:off x="8430787" y="4888702"/>
             <a:ext cx="2194560" cy="237744"/>
           </a:xfrm>
           <a:prstGeom prst="rect">
@@ -5561,7 +5561,7 @@
                 </a:solidFill>
                 <a:latin typeface="Roboto"/>
               </a:rPr>
-              <a:t>491 people were helped in April, and 66 came to a program but couldn't be helped: 88.2% reached (target 90.0%), against 87.1% in March.</a:t>
+              <a:t>491 people were helped in April, and 93 came to a program but couldn't be helped: 84.1% reached (target 90.0%), against 85.7% in March.</a:t>
             </a:r>
           </a:p>
         </p:txBody>
@@ -5688,7 +5688,7 @@
                 </a:solidFill>
                 <a:latin typeface="Roboto"/>
               </a:rPr>
-              <a:t>Housing support reached the smallest share: 85.6% (13 couldn't be helped). The main reason: program at capacity (24 people).</a:t>
+              <a:t>Community meals reached the smallest share: 80.8% (42 couldn't be helped). The main reason: program at capacity (34 people).</a:t>
             </a:r>
           </a:p>
         </p:txBody>
@@ -5766,7 +5766,7 @@
                 </a:solidFill>
                 <a:latin typeface="Roboto"/>
               </a:rPr>
-              <a:t>Data retrieved 2pm, Tue 6 Oct 2026 · Generated 8 Oct 2026, 6:29pm · Sample data · Made with Python (python-pptx)</a:t>
+              <a:t>Data retrieved 2pm, Tue 6 Oct 2026 · Generated 8 Oct 2026, 11:41pm · Sample data · Made with Python (python-pptx)</a:t>
             </a:r>
           </a:p>
         </p:txBody>
@@ -6081,7 +6081,7 @@
                 </a:solidFill>
                 <a:latin typeface="Roboto"/>
               </a:rPr>
-              <a:t>Data retrieved 2pm, Tue 6 Oct 2026 · Generated 8 Oct 2026, 6:29pm · Sample data · Made with Python (python-pptx)</a:t>
+              <a:t>Data retrieved 2pm, Tue 6 Oct 2026 · Generated 8 Oct 2026, 11:41pm · Sample data · Made with Python (python-pptx)</a:t>
             </a:r>
           </a:p>
         </p:txBody>
@@ -6389,7 +6389,7 @@
                           </a:solidFill>
                           <a:latin typeface="Roboto"/>
                         </a:rPr>
-                        <a:t>24</a:t>
+                        <a:t>34</a:t>
                       </a:r>
                     </a:p>
                   </a:txBody>
@@ -6418,7 +6418,7 @@
                           </a:solidFill>
                           <a:latin typeface="Roboto"/>
                         </a:rPr>
-                        <a:t>Waitlist</a:t>
+                        <a:t>Outside the service area</a:t>
                       </a:r>
                     </a:p>
                   </a:txBody>
@@ -6445,7 +6445,7 @@
                           </a:solidFill>
                           <a:latin typeface="Roboto"/>
                         </a:rPr>
-                        <a:t>20</a:t>
+                        <a:t>18</a:t>
                       </a:r>
                     </a:p>
                   </a:txBody>
@@ -6474,7 +6474,7 @@
                           </a:solidFill>
                           <a:latin typeface="Roboto"/>
                         </a:rPr>
-                        <a:t>Outside the service area</a:t>
+                        <a:t>Waitlist</a:t>
                       </a:r>
                     </a:p>
                   </a:txBody>
@@ -6501,7 +6501,7 @@
                           </a:solidFill>
                           <a:latin typeface="Roboto"/>
                         </a:rPr>
-                        <a:t>12</a:t>
+                        <a:t>17</a:t>
                       </a:r>
                     </a:p>
                   </a:txBody>
@@ -6557,7 +6557,7 @@
                           </a:solidFill>
                           <a:latin typeface="Roboto"/>
                         </a:rPr>
-                        <a:t>5</a:t>
+                        <a:t>16</a:t>
                       </a:r>
                     </a:p>
                   </a:txBody>
@@ -6613,7 +6613,7 @@
                           </a:solidFill>
                           <a:latin typeface="Roboto"/>
                         </a:rPr>
-                        <a:t>5</a:t>
+                        <a:t>8</a:t>
                       </a:r>
                     </a:p>
                   </a:txBody>
@@ -6701,7 +6701,7 @@
                 </a:solidFill>
                 <a:latin typeface="Roboto"/>
               </a:rPr>
-              <a:t>Data retrieved 2pm, Tue 6 Oct 2026 · Generated 8 Oct 2026, 6:29pm · Sample data · Made with Python (python-pptx)</a:t>
+              <a:t>Data retrieved 2pm, Tue 6 Oct 2026 · Generated 8 Oct 2026, 11:41pm · Sample data · Made with Python (python-pptx)</a:t>
             </a:r>
           </a:p>
         </p:txBody>

--- a/media/exports/reports/2026-04/people-helped.pptx
+++ b/media/exports/reports/2026-04/people-helped.pptx
@@ -999,7 +999,7 @@
           <a:lstStyle/>
           <a:p>
             <a:r>
-              <a:t>How many people did we help this month, and how many couldn't we reach?. Sample Community Services Ltd. Period: April 2026. People helped by each program, day by day, and the people who came to a program but couldn't be helped (and why). People helped are counted against each program's own grant spend.</a:t>
+              <a:t>How many people did we help this month, and how many couldn't we reach?. Sample Community Services Ltd. Period: April 2026. In short: 491 people helped in April; 93 couldn't be reached (84.1% reached, target 90.0%). People helped by each program, day by day, and the people who came to a program but couldn't be helped (and why). People helped are counted against each program's own grant spend.</a:t>
             </a:r>
           </a:p>
         </p:txBody>
@@ -4434,7 +4434,7 @@
         <p:spPr>
           <a:xfrm>
             <a:off x="457200" y="3703320"/>
-            <a:ext cx="11277295" cy="535940"/>
+            <a:ext cx="11277295" cy="758190"/>
           </a:xfrm>
           <a:prstGeom prst="rect">
             <a:avLst/>
@@ -4459,7 +4459,7 @@
                 </a:solidFill>
                 <a:latin typeface="Roboto"/>
               </a:rPr>
-              <a:t>Period: April 2026. People helped by each program, day by day, and the people who came to a program but couldn't be helped (and why). People helped are counted against each program's own grant spend.</a:t>
+              <a:t>Period: April 2026. In short: 491 people helped in April; 93 couldn't be reached (84.1% reached, target 90.0%). People helped by each program, day by day, and the people who came to a program but couldn't be helped (and why). People helped are counted against each program's own grant spend.</a:t>
             </a:r>
           </a:p>
         </p:txBody>
@@ -4472,7 +4472,7 @@
         </p:nvSpPr>
         <p:spPr>
           <a:xfrm>
-            <a:off x="457200" y="4330700"/>
+            <a:off x="457200" y="4552950"/>
             <a:ext cx="11277295" cy="1097280"/>
           </a:xfrm>
           <a:prstGeom prst="rect">
@@ -4624,7 +4624,7 @@
                 </a:solidFill>
                 <a:latin typeface="Roboto"/>
               </a:rPr>
-              <a:t>Data retrieved 2pm, Tue 6 Oct 2026 · Generated 8 Oct 2026, 11:41pm · Sample data · Made with Python (python-pptx)</a:t>
+              <a:t>Data retrieved 2pm, Tue 6 Oct 2026 · Generated 10 Oct 2026, 9:55pm · Sample data · Made with Python (python-pptx)</a:t>
             </a:r>
           </a:p>
         </p:txBody>
@@ -5766,7 +5766,7 @@
                 </a:solidFill>
                 <a:latin typeface="Roboto"/>
               </a:rPr>
-              <a:t>Data retrieved 2pm, Tue 6 Oct 2026 · Generated 8 Oct 2026, 11:41pm · Sample data · Made with Python (python-pptx)</a:t>
+              <a:t>Data retrieved 2pm, Tue 6 Oct 2026 · Generated 10 Oct 2026, 9:55pm · Sample data · Made with Python (python-pptx)</a:t>
             </a:r>
           </a:p>
         </p:txBody>
@@ -6081,7 +6081,7 @@
                 </a:solidFill>
                 <a:latin typeface="Roboto"/>
               </a:rPr>
-              <a:t>Data retrieved 2pm, Tue 6 Oct 2026 · Generated 8 Oct 2026, 11:41pm · Sample data · Made with Python (python-pptx)</a:t>
+              <a:t>Data retrieved 2pm, Tue 6 Oct 2026 · Generated 10 Oct 2026, 9:55pm · Sample data · Made with Python (python-pptx)</a:t>
             </a:r>
           </a:p>
         </p:txBody>
@@ -6701,7 +6701,7 @@
                 </a:solidFill>
                 <a:latin typeface="Roboto"/>
               </a:rPr>
-              <a:t>Data retrieved 2pm, Tue 6 Oct 2026 · Generated 8 Oct 2026, 11:41pm · Sample data · Made with Python (python-pptx)</a:t>
+              <a:t>Data retrieved 2pm, Tue 6 Oct 2026 · Generated 10 Oct 2026, 9:55pm · Sample data · Made with Python (python-pptx)</a:t>
             </a:r>
           </a:p>
         </p:txBody>
